--- a/assets/pptx/catalog-251.pptx
+++ b/assets/pptx/catalog-251.pptx
@@ -3286,7 +3286,7 @@
                 <a:ea typeface="Ebrima"/>
                 <a:cs typeface="Ebrima"/>
               </a:rPr>
-              <a:t>እንመርቃቹሃለን አሜን (6x)</a:t>
+              <a:t>እንመርቃቹሃለን አሜን 6x</a:t>
             </a:r>
           </a:p>
         </p:txBody>
@@ -3371,7 +3371,7 @@
                 <a:ea typeface="Ebrima"/>
                 <a:cs typeface="Ebrima"/>
               </a:rPr>
-              <a:t>ተባረኩ ብለን እንመርቃቹሃለን (2x)</a:t>
+              <a:t>ተባረኩ ብለን እንመርቃቹሃለን 2x</a:t>
             </a:r>
           </a:p>
         </p:txBody>
@@ -3559,7 +3559,7 @@
                 <a:ea typeface="Ebrima"/>
                 <a:cs typeface="Ebrima"/>
               </a:rPr>
-              <a:t>እንመርቃቹሃለን አሜን (6x)</a:t>
+              <a:t>እንመርቃቹሃለን አሜን 6x</a:t>
             </a:r>
           </a:p>
         </p:txBody>
@@ -3644,7 +3644,7 @@
                 <a:ea typeface="Ebrima"/>
                 <a:cs typeface="Ebrima"/>
               </a:rPr>
-              <a:t>ተባረኩ ብለን እንመርቃቹሃለን (2x)</a:t>
+              <a:t>ተባረኩ ብለን እንመርቃቹሃለን 2x</a:t>
             </a:r>
           </a:p>
         </p:txBody>
@@ -3783,7 +3783,7 @@
                 <a:ea typeface="Ebrima"/>
                 <a:cs typeface="Ebrima"/>
               </a:rPr>
-              <a:t>ከድግስ ያለፈ (አዎ) በሕይወታቸው ጉዞ (አዎ)</a:t>
+              <a:t>ከድግስ ያለፈ አዎ በሕይወታቸው ጉዞ አዎ</a:t>
             </a:r>
           </a:p>
           <a:p>
@@ -3904,7 +3904,7 @@
                 <a:ea typeface="Ebrima"/>
                 <a:cs typeface="Ebrima"/>
               </a:rPr>
-              <a:t>እንመርቃቹሃለን አሜን (6x)</a:t>
+              <a:t>እንመርቃቹሃለን አሜን 6x</a:t>
             </a:r>
           </a:p>
         </p:txBody>
@@ -3989,7 +3989,7 @@
                 <a:ea typeface="Ebrima"/>
                 <a:cs typeface="Ebrima"/>
               </a:rPr>
-              <a:t>ተባረኩ ብለን እንመርቃቹሃለን (2x)</a:t>
+              <a:t>ተባረኩ ብለን እንመርቃቹሃለን 2x</a:t>
             </a:r>
           </a:p>
         </p:txBody>
@@ -4128,7 +4128,7 @@
                 <a:ea typeface="Ebrima"/>
                 <a:cs typeface="Ebrima"/>
               </a:rPr>
-              <a:t>እግዚአብሔር አዘዘ (አዎ) ጋብቻ እንዲከበር (አዎ)</a:t>
+              <a:t>እግዚአብሔር አዘዘ አዎ ጋብቻ እንዲከበር አዎ</a:t>
             </a:r>
           </a:p>
           <a:p>
@@ -4285,7 +4285,7 @@
                 <a:ea typeface="Ebrima"/>
                 <a:cs typeface="Ebrima"/>
               </a:rPr>
-              <a:t>እግዚአብሔር ያኖራል (አዎ) መኖሪያቹህ ሆኖ (አዎ)</a:t>
+              <a:t>እግዚአብሔር ያኖራል አዎ መኖሪያቹህ ሆኖ አዎ</a:t>
             </a:r>
           </a:p>
           <a:p>
